--- a/classes/parte-3-estadistica-inferencial/190-uplift-modeling-did-difference-in-differences/clase-190-uplift-modeling-did-difference-in-differences-presentacion.pptx
+++ b/classes/parte-3-estadistica-inferencial/190-uplift-modeling-did-difference-in-differences/clase-190-uplift-modeling-did-difference-in-differences-presentacion.pptx
@@ -4845,7 +4845,7 @@
                 </a:solidFill>
                 <a:latin typeface="Segoe UI"/>
               </a:rPr>
-              <a:t>Primer bloque ejecutable del notebook.</a:t>
+              <a:t>Y = β₀ + β₁·tratado + β₂·post + β₃·(tratado×post) + ε. El coeficiente β₃ es el efecto causal bajo parallel trends.</a:t>
             </a:r>
           </a:p>
         </p:txBody>
@@ -4932,7 +4932,349 @@
                 </a:solidFill>
                 <a:latin typeface="Courier New"/>
               </a:rPr>
-              <a:t># Imports y configuración inicial</a:t>
+              <a:t>import numpy as np</a:t>
+            </a:r>
+          </a:p>
+          <a:p>
+            <a:pPr>
+              <a:defRPr sz="1200" b="0">
+                <a:solidFill>
+                  <a:srgbClr val="F8FAFC"/>
+                </a:solidFill>
+                <a:latin typeface="Courier New"/>
+              </a:defRPr>
+            </a:pPr>
+            <a:r>
+              <a:rPr sz="1200" b="0">
+                <a:solidFill>
+                  <a:srgbClr val="F8FAFC"/>
+                </a:solidFill>
+                <a:latin typeface="Courier New"/>
+              </a:rPr>
+              <a:t>import pandas as pd</a:t>
+            </a:r>
+          </a:p>
+          <a:p>
+            <a:pPr>
+              <a:defRPr sz="1200" b="0">
+                <a:solidFill>
+                  <a:srgbClr val="F8FAFC"/>
+                </a:solidFill>
+                <a:latin typeface="Courier New"/>
+              </a:defRPr>
+            </a:pPr>
+            <a:r>
+              <a:rPr sz="1200" b="0">
+                <a:solidFill>
+                  <a:srgbClr val="F8FAFC"/>
+                </a:solidFill>
+                <a:latin typeface="Courier New"/>
+              </a:rPr>
+              <a:t>import statsmodels.formula.api as smf</a:t>
+            </a:r>
+          </a:p>
+          <a:p>
+            <a:pPr>
+              <a:defRPr sz="1200" b="0">
+                <a:solidFill>
+                  <a:srgbClr val="F8FAFC"/>
+                </a:solidFill>
+                <a:latin typeface="Courier New"/>
+              </a:defRPr>
+            </a:pPr>
+            <a:r>
+              <a:rPr sz="1200" b="0">
+                <a:solidFill>
+                  <a:srgbClr val="F8FAFC"/>
+                </a:solidFill>
+                <a:latin typeface="Courier New"/>
+              </a:rPr>
+              <a:t>from sklearn.ensemble import RandomForestClassifier</a:t>
+            </a:r>
+          </a:p>
+          <a:p>
+            <a:pPr>
+              <a:defRPr sz="1200" b="0">
+                <a:solidFill>
+                  <a:srgbClr val="F8FAFC"/>
+                </a:solidFill>
+                <a:latin typeface="Courier New"/>
+              </a:defRPr>
+            </a:pPr>
+            <a:r>
+              <a:rPr sz="1200" b="0">
+                <a:solidFill>
+                  <a:srgbClr val="F8FAFC"/>
+                </a:solidFill>
+                <a:latin typeface="Courier New"/>
+              </a:rPr>
+              <a:t>import matplotlib.pyplot as plt</a:t>
+            </a:r>
+          </a:p>
+          <a:p>
+            <a:pPr>
+              <a:defRPr sz="1200" b="0">
+                <a:solidFill>
+                  <a:srgbClr val="F8FAFC"/>
+                </a:solidFill>
+                <a:latin typeface="Courier New"/>
+              </a:defRPr>
+            </a:pPr>
+            <a:r>
+              <a:rPr sz="1200" b="0">
+                <a:solidFill>
+                  <a:srgbClr val="F8FAFC"/>
+                </a:solidFill>
+                <a:latin typeface="Courier New"/>
+              </a:rPr>
+              <a:t> </a:t>
+            </a:r>
+          </a:p>
+          <a:p>
+            <a:pPr>
+              <a:defRPr sz="1200" b="0">
+                <a:solidFill>
+                  <a:srgbClr val="F8FAFC"/>
+                </a:solidFill>
+                <a:latin typeface="Courier New"/>
+              </a:defRPr>
+            </a:pPr>
+            <a:r>
+              <a:rPr sz="1200" b="0">
+                <a:solidFill>
+                  <a:srgbClr val="F8FAFC"/>
+                </a:solidFill>
+                <a:latin typeface="Courier New"/>
+              </a:rPr>
+              <a:t>rng = np.random.default_rng(42)</a:t>
+            </a:r>
+          </a:p>
+          <a:p>
+            <a:pPr>
+              <a:defRPr sz="1200" b="0">
+                <a:solidFill>
+                  <a:srgbClr val="F8FAFC"/>
+                </a:solidFill>
+                <a:latin typeface="Courier New"/>
+              </a:defRPr>
+            </a:pPr>
+            <a:r>
+              <a:rPr sz="1200" b="0">
+                <a:solidFill>
+                  <a:srgbClr val="F8FAFC"/>
+                </a:solidFill>
+                <a:latin typeface="Courier New"/>
+              </a:rPr>
+              <a:t> </a:t>
+            </a:r>
+          </a:p>
+          <a:p>
+            <a:pPr>
+              <a:defRPr sz="1200" b="0">
+                <a:solidFill>
+                  <a:srgbClr val="F8FAFC"/>
+                </a:solidFill>
+                <a:latin typeface="Courier New"/>
+              </a:defRPr>
+            </a:pPr>
+            <a:r>
+              <a:rPr sz="1200" b="0">
+                <a:solidFill>
+                  <a:srgbClr val="F8FAFC"/>
+                </a:solidFill>
+                <a:latin typeface="Courier New"/>
+              </a:rPr>
+              <a:t>n = 2000</a:t>
+            </a:r>
+          </a:p>
+          <a:p>
+            <a:pPr>
+              <a:defRPr sz="1200" b="0">
+                <a:solidFill>
+                  <a:srgbClr val="F8FAFC"/>
+                </a:solidFill>
+                <a:latin typeface="Courier New"/>
+              </a:defRPr>
+            </a:pPr>
+            <a:r>
+              <a:rPr sz="1200" b="0">
+                <a:solidFill>
+                  <a:srgbClr val="F8FAFC"/>
+                </a:solidFill>
+                <a:latin typeface="Courier New"/>
+              </a:rPr>
+              <a:t>treated = rng.integers(0, 2, n)</a:t>
+            </a:r>
+          </a:p>
+          <a:p>
+            <a:pPr>
+              <a:defRPr sz="1200" b="0">
+                <a:solidFill>
+                  <a:srgbClr val="F8FAFC"/>
+                </a:solidFill>
+                <a:latin typeface="Courier New"/>
+              </a:defRPr>
+            </a:pPr>
+            <a:r>
+              <a:rPr sz="1200" b="0">
+                <a:solidFill>
+                  <a:srgbClr val="F8FAFC"/>
+                </a:solidFill>
+                <a:latin typeface="Courier New"/>
+              </a:rPr>
+              <a:t>post = rng.integers(0, 2, n)</a:t>
+            </a:r>
+          </a:p>
+          <a:p>
+            <a:pPr>
+              <a:defRPr sz="1200" b="0">
+                <a:solidFill>
+                  <a:srgbClr val="F8FAFC"/>
+                </a:solidFill>
+                <a:latin typeface="Courier New"/>
+              </a:defRPr>
+            </a:pPr>
+            <a:r>
+              <a:rPr sz="1200" b="0">
+                <a:solidFill>
+                  <a:srgbClr val="F8FAFC"/>
+                </a:solidFill>
+                <a:latin typeface="Courier New"/>
+              </a:rPr>
+              <a:t>true_effect = 2.5</a:t>
+            </a:r>
+          </a:p>
+          <a:p>
+            <a:pPr>
+              <a:defRPr sz="1200" b="0">
+                <a:solidFill>
+                  <a:srgbClr val="F8FAFC"/>
+                </a:solidFill>
+                <a:latin typeface="Courier New"/>
+              </a:defRPr>
+            </a:pPr>
+            <a:r>
+              <a:rPr sz="1200" b="0">
+                <a:solidFill>
+                  <a:srgbClr val="F8FAFC"/>
+                </a:solidFill>
+                <a:latin typeface="Courier New"/>
+              </a:rPr>
+              <a:t>Y = 10 + 1.5*treated + 3.0*post + true_effect*(treated*post) + rng.normal(0, 2, n)</a:t>
+            </a:r>
+          </a:p>
+          <a:p>
+            <a:pPr>
+              <a:defRPr sz="1200" b="0">
+                <a:solidFill>
+                  <a:srgbClr val="F8FAFC"/>
+                </a:solidFill>
+                <a:latin typeface="Courier New"/>
+              </a:defRPr>
+            </a:pPr>
+            <a:r>
+              <a:rPr sz="1200" b="0">
+                <a:solidFill>
+                  <a:srgbClr val="F8FAFC"/>
+                </a:solidFill>
+                <a:latin typeface="Courier New"/>
+              </a:rPr>
+              <a:t>df = pd.DataFrame({"Y": Y, "treated": treated, "post": post})</a:t>
+            </a:r>
+          </a:p>
+          <a:p>
+            <a:pPr>
+              <a:defRPr sz="1200" b="0">
+                <a:solidFill>
+                  <a:srgbClr val="F8FAFC"/>
+                </a:solidFill>
+                <a:latin typeface="Courier New"/>
+              </a:defRPr>
+            </a:pPr>
+            <a:r>
+              <a:rPr sz="1200" b="0">
+                <a:solidFill>
+                  <a:srgbClr val="F8FAFC"/>
+                </a:solidFill>
+                <a:latin typeface="Courier New"/>
+              </a:rPr>
+              <a:t>m = smf.ols("Y ~ treated * post", data=df).fit()</a:t>
+            </a:r>
+          </a:p>
+          <a:p>
+            <a:pPr>
+              <a:defRPr sz="1200" b="0">
+                <a:solidFill>
+                  <a:srgbClr val="F8FAFC"/>
+                </a:solidFill>
+                <a:latin typeface="Courier New"/>
+              </a:defRPr>
+            </a:pPr>
+            <a:r>
+              <a:rPr sz="1200" b="0">
+                <a:solidFill>
+                  <a:srgbClr val="F8FAFC"/>
+                </a:solidFill>
+                <a:latin typeface="Courier New"/>
+              </a:rPr>
+              <a:t>beta3 = m.params["treated:post"]</a:t>
+            </a:r>
+          </a:p>
+          <a:p>
+            <a:pPr>
+              <a:defRPr sz="1200" b="0">
+                <a:solidFill>
+                  <a:srgbClr val="F8FAFC"/>
+                </a:solidFill>
+                <a:latin typeface="Courier New"/>
+              </a:defRPr>
+            </a:pPr>
+            <a:r>
+              <a:rPr sz="1200" b="0">
+                <a:solidFill>
+                  <a:srgbClr val="F8FAFC"/>
+                </a:solidFill>
+                <a:latin typeface="Courier New"/>
+              </a:rPr>
+              <a:t>ci = m.conf_int().loc["treated:post"]</a:t>
+            </a:r>
+          </a:p>
+          <a:p>
+            <a:pPr>
+              <a:defRPr sz="1200" b="0">
+                <a:solidFill>
+                  <a:srgbClr val="F8FAFC"/>
+                </a:solidFill>
+                <a:latin typeface="Courier New"/>
+              </a:defRPr>
+            </a:pPr>
+            <a:r>
+              <a:rPr sz="1200" b="0">
+                <a:solidFill>
+                  <a:srgbClr val="F8FAFC"/>
+                </a:solidFill>
+                <a:latin typeface="Courier New"/>
+              </a:rPr>
+              <a:t>print(f"DiD β3 = {beta3:.3f}  IC95%=({ci[0]:.3f}, {ci[1]:.3f})  verdadero={true_effect}")</a:t>
+            </a:r>
+          </a:p>
+          <a:p>
+            <a:pPr>
+              <a:defRPr sz="1200" b="0">
+                <a:solidFill>
+                  <a:srgbClr val="F8FAFC"/>
+                </a:solidFill>
+                <a:latin typeface="Courier New"/>
+              </a:defRPr>
+            </a:pPr>
+            <a:r>
+              <a:rPr sz="1200" b="0">
+                <a:solidFill>
+                  <a:srgbClr val="F8FAFC"/>
+                </a:solidFill>
+                <a:latin typeface="Courier New"/>
+              </a:rPr>
+              <a:t>assert abs(beta3 - true_effect) &lt; 0.5</a:t>
             </a:r>
           </a:p>
         </p:txBody>

--- a/classes/parte-3-estadistica-inferencial/190-uplift-modeling-did-difference-in-differences/clase-190-uplift-modeling-did-difference-in-differences-presentacion.pptx
+++ b/classes/parte-3-estadistica-inferencial/190-uplift-modeling-did-difference-in-differences/clase-190-uplift-modeling-did-difference-in-differences-presentacion.pptx
@@ -3272,7 +3272,7 @@
                 </a:solidFill>
                 <a:latin typeface="Segoe UI"/>
               </a:rPr>
-              <a:t>Parte: 3 — Estadística Inferencial y Causal · Fuente: Gutierrez &amp; Gerardy (2017), Causal Inference and Uplift Modeling + Abadie, Diamond &amp; Hainmueller (2010), Synthetic Control Methods.  Duración estimada: 90 min.</a:t>
+              <a:t>Parte: 3 — Estadística Inferencial y Causal · Fuente: Gutierrez &amp; Gerardy (2017), Causal Inference and Uplift Modeling + Abadie, Diamond &amp; Hainmueller (2010), Synthetic Control Methods.  Duración estimada: 90 min. · Nivel: Avanzado</a:t>
             </a:r>
           </a:p>
         </p:txBody>
@@ -3581,7 +3581,7 @@
                 </a:solidFill>
                 <a:latin typeface="Segoe UI"/>
               </a:rPr>
-              <a:t>Parte: 3 — Estadística Inferencial y Causal · Fuente: Gutierrez &amp; Gerardy (2017), Causal Inference and Uplift Modeling + Abadie, Diamond &amp; Hainmueller (2010), Synthetic Control Methods.  Duración estimada: 90 min.</a:t>
+              <a:t>Parte: 3 — Estadística Inferencial y Causal · Fuente: Gutierrez &amp; Gerardy (2017), Causal Inference and Uplift Modeling + Abadie, Diamond &amp; Hainmueller (2010), Synthetic Control Methods.  Duración estimada: 90 min. · Nivel: Avanzado</a:t>
             </a:r>
           </a:p>
         </p:txBody>
